--- a/docs/03-Slides/ETHAGT12/ETHAGT12-slides.pptx
+++ b/docs/03-Slides/ETHAGT12/ETHAGT12-slides.pptx
@@ -13928,6 +13928,42 @@
         </p:nvSpPr>
         <p:spPr>
           <a:xfrm>
+            <a:off x="274320" y="6035040"/>
+            <a:ext cx="11612880" cy="320040"/>
+          </a:xfrm>
+          <a:prstGeom prst="rect">
+            <a:avLst/>
+          </a:prstGeom>
+          <a:noFill/>
+        </p:spPr>
+        <p:txBody>
+          <a:bodyPr wrap="square">
+            <a:spAutoFit/>
+          </a:bodyPr>
+          <a:lstStyle/>
+          <a:p>
+            <a:pPr algn="l">
+              <a:defRPr sz="900" b="0">
+                <a:solidFill>
+                  <a:srgbClr val="2980B9"/>
+                </a:solidFill>
+                <a:latin typeface="Segoe UI"/>
+              </a:defRPr>
+            </a:pPr>
+            <a:r>
+              <a:t>LLM = Large Language Model — Modelo de Linguagem de Grande Escala  ·  SWE-bench = Software Engineering Benchmark — benchmark de issues reais do GitHub</a:t>
+            </a:r>
+          </a:p>
+        </p:txBody>
+      </p:sp>
+      <p:sp>
+        <p:nvSpPr>
+          <p:cNvPr id="8" name="TextBox 7"/>
+          <p:cNvSpPr txBox="1"/>
+          <p:nvPr/>
+        </p:nvSpPr>
+        <p:spPr>
+          <a:xfrm>
             <a:off x="274320" y="6400800"/>
             <a:ext cx="6400800" cy="365760"/>
           </a:xfrm>
@@ -13958,7 +13994,7 @@
       </p:sp>
       <p:sp>
         <p:nvSpPr>
-          <p:cNvPr id="8" name="TextBox 7"/>
+          <p:cNvPr id="9" name="TextBox 8"/>
           <p:cNvSpPr txBox="1"/>
           <p:nvPr/>
         </p:nvSpPr>
@@ -15113,6 +15149,42 @@
         </p:nvSpPr>
         <p:spPr>
           <a:xfrm>
+            <a:off x="274320" y="6035040"/>
+            <a:ext cx="11612880" cy="320040"/>
+          </a:xfrm>
+          <a:prstGeom prst="rect">
+            <a:avLst/>
+          </a:prstGeom>
+          <a:noFill/>
+        </p:spPr>
+        <p:txBody>
+          <a:bodyPr wrap="square">
+            <a:spAutoFit/>
+          </a:bodyPr>
+          <a:lstStyle/>
+          <a:p>
+            <a:pPr algn="l">
+              <a:defRPr sz="900" b="0">
+                <a:solidFill>
+                  <a:srgbClr val="2980B9"/>
+                </a:solidFill>
+                <a:latin typeface="Segoe UI"/>
+              </a:defRPr>
+            </a:pPr>
+            <a:r>
+              <a:t>P95 = Percentil 95 — latencia abaixo da qual 95% das requisicoes ficam  ·  P99 = Percentil 99 — latencia abaixo da qual 99% das requisicoes ficam</a:t>
+            </a:r>
+          </a:p>
+        </p:txBody>
+      </p:sp>
+      <p:sp>
+        <p:nvSpPr>
+          <p:cNvPr id="8" name="TextBox 7"/>
+          <p:cNvSpPr txBox="1"/>
+          <p:nvPr/>
+        </p:nvSpPr>
+        <p:spPr>
+          <a:xfrm>
             <a:off x="274320" y="6400800"/>
             <a:ext cx="6400800" cy="365760"/>
           </a:xfrm>
@@ -15143,7 +15215,7 @@
       </p:sp>
       <p:sp>
         <p:nvSpPr>
-          <p:cNvPr id="8" name="TextBox 7"/>
+          <p:cNvPr id="9" name="TextBox 8"/>
           <p:cNvSpPr txBox="1"/>
           <p:nvPr/>
         </p:nvSpPr>
@@ -18451,6 +18523,42 @@
         </p:nvSpPr>
         <p:spPr>
           <a:xfrm>
+            <a:off x="274320" y="6035040"/>
+            <a:ext cx="11612880" cy="320040"/>
+          </a:xfrm>
+          <a:prstGeom prst="rect">
+            <a:avLst/>
+          </a:prstGeom>
+          <a:noFill/>
+        </p:spPr>
+        <p:txBody>
+          <a:bodyPr wrap="square">
+            <a:spAutoFit/>
+          </a:bodyPr>
+          <a:lstStyle/>
+          <a:p>
+            <a:pPr algn="l">
+              <a:defRPr sz="900" b="0">
+                <a:solidFill>
+                  <a:srgbClr val="2980B9"/>
+                </a:solidFill>
+                <a:latin typeface="Segoe UI"/>
+              </a:defRPr>
+            </a:pPr>
+            <a:r>
+              <a:t>LLM-as-Judge = uso de um LLM como avaliador automatico de saidas de outro LLM</a:t>
+            </a:r>
+          </a:p>
+        </p:txBody>
+      </p:sp>
+      <p:sp>
+        <p:nvSpPr>
+          <p:cNvPr id="8" name="TextBox 7"/>
+          <p:cNvSpPr txBox="1"/>
+          <p:nvPr/>
+        </p:nvSpPr>
+        <p:spPr>
+          <a:xfrm>
             <a:off x="274320" y="6400800"/>
             <a:ext cx="6400800" cy="365760"/>
           </a:xfrm>
@@ -18481,7 +18589,7 @@
       </p:sp>
       <p:sp>
         <p:nvSpPr>
-          <p:cNvPr id="8" name="TextBox 7"/>
+          <p:cNvPr id="9" name="TextBox 8"/>
           <p:cNvSpPr txBox="1"/>
           <p:nvPr/>
         </p:nvSpPr>
@@ -30611,6 +30719,42 @@
         </p:nvSpPr>
         <p:spPr>
           <a:xfrm>
+            <a:off x="274320" y="6035040"/>
+            <a:ext cx="11612880" cy="320040"/>
+          </a:xfrm>
+          <a:prstGeom prst="rect">
+            <a:avLst/>
+          </a:prstGeom>
+          <a:noFill/>
+        </p:spPr>
+        <p:txBody>
+          <a:bodyPr wrap="square">
+            <a:spAutoFit/>
+          </a:bodyPr>
+          <a:lstStyle/>
+          <a:p>
+            <a:pPr algn="l">
+              <a:defRPr sz="900" b="0">
+                <a:solidFill>
+                  <a:srgbClr val="2980B9"/>
+                </a:solidFill>
+                <a:latin typeface="Segoe UI"/>
+              </a:defRPr>
+            </a:pPr>
+            <a:r>
+              <a:t>LLMOps = LLM Operations — praticas de MLOps adaptadas a LLMs  ·  ReAct = Reasoning and Acting — padrao de loop Thought / Action / Observation</a:t>
+            </a:r>
+          </a:p>
+        </p:txBody>
+      </p:sp>
+      <p:sp>
+        <p:nvSpPr>
+          <p:cNvPr id="8" name="TextBox 7"/>
+          <p:cNvSpPr txBox="1"/>
+          <p:nvPr/>
+        </p:nvSpPr>
+        <p:spPr>
+          <a:xfrm>
             <a:off x="274320" y="6400800"/>
             <a:ext cx="6400800" cy="365760"/>
           </a:xfrm>
@@ -30641,7 +30785,7 @@
       </p:sp>
       <p:sp>
         <p:nvSpPr>
-          <p:cNvPr id="8" name="TextBox 7"/>
+          <p:cNvPr id="9" name="TextBox 8"/>
           <p:cNvSpPr txBox="1"/>
           <p:nvPr/>
         </p:nvSpPr>
@@ -31580,6 +31724,42 @@
         </p:nvSpPr>
         <p:spPr>
           <a:xfrm>
+            <a:off x="274320" y="6035040"/>
+            <a:ext cx="11612880" cy="320040"/>
+          </a:xfrm>
+          <a:prstGeom prst="rect">
+            <a:avLst/>
+          </a:prstGeom>
+          <a:noFill/>
+        </p:spPr>
+        <p:txBody>
+          <a:bodyPr wrap="square">
+            <a:spAutoFit/>
+          </a:bodyPr>
+          <a:lstStyle/>
+          <a:p>
+            <a:pPr algn="l">
+              <a:defRPr sz="900" b="0">
+                <a:solidFill>
+                  <a:srgbClr val="2980B9"/>
+                </a:solidFill>
+                <a:latin typeface="Segoe UI"/>
+              </a:defRPr>
+            </a:pPr>
+            <a:r>
+              <a:t>ACI = Agent-Computer Interface — Interface Agente-Computador</a:t>
+            </a:r>
+          </a:p>
+        </p:txBody>
+      </p:sp>
+      <p:sp>
+        <p:nvSpPr>
+          <p:cNvPr id="8" name="TextBox 7"/>
+          <p:cNvSpPr txBox="1"/>
+          <p:nvPr/>
+        </p:nvSpPr>
+        <p:spPr>
+          <a:xfrm>
             <a:off x="274320" y="6400800"/>
             <a:ext cx="6400800" cy="365760"/>
           </a:xfrm>
@@ -31610,7 +31790,7 @@
       </p:sp>
       <p:sp>
         <p:nvSpPr>
-          <p:cNvPr id="8" name="TextBox 7"/>
+          <p:cNvPr id="9" name="TextBox 8"/>
           <p:cNvSpPr txBox="1"/>
           <p:nvPr/>
         </p:nvSpPr>
@@ -38589,6 +38769,42 @@
         </p:nvSpPr>
         <p:spPr>
           <a:xfrm>
+            <a:off x="274320" y="6035040"/>
+            <a:ext cx="11612880" cy="320040"/>
+          </a:xfrm>
+          <a:prstGeom prst="rect">
+            <a:avLst/>
+          </a:prstGeom>
+          <a:noFill/>
+        </p:spPr>
+        <p:txBody>
+          <a:bodyPr wrap="square">
+            <a:spAutoFit/>
+          </a:bodyPr>
+          <a:lstStyle/>
+          <a:p>
+            <a:pPr algn="l">
+              <a:defRPr sz="900" b="0">
+                <a:solidFill>
+                  <a:srgbClr val="2980B9"/>
+                </a:solidFill>
+                <a:latin typeface="Segoe UI"/>
+              </a:defRPr>
+            </a:pPr>
+            <a:r>
+              <a:t>RAG = Retrieval-Augmented Generation — Geracao Aumentada por Recuperacao</a:t>
+            </a:r>
+          </a:p>
+        </p:txBody>
+      </p:sp>
+      <p:sp>
+        <p:nvSpPr>
+          <p:cNvPr id="8" name="TextBox 7"/>
+          <p:cNvSpPr txBox="1"/>
+          <p:nvPr/>
+        </p:nvSpPr>
+        <p:spPr>
+          <a:xfrm>
             <a:off x="274320" y="6400800"/>
             <a:ext cx="6400800" cy="365760"/>
           </a:xfrm>
@@ -38619,7 +38835,7 @@
       </p:sp>
       <p:sp>
         <p:nvSpPr>
-          <p:cNvPr id="8" name="TextBox 7"/>
+          <p:cNvPr id="9" name="TextBox 8"/>
           <p:cNvSpPr txBox="1"/>
           <p:nvPr/>
         </p:nvSpPr>
